--- a/test-corpus/word-verification/journey.pptx
+++ b/test-corpus/word-verification/journey.pptx
@@ -144,8 +144,8 @@
         </p:nvSpPr>
         <p:spPr>
           <a:xfrm>
-            <a:off x="457200" y="1883880"/>
-            <a:ext cx="11277600" cy="612610"/>
+            <a:off x="457200" y="2572684"/>
+            <a:ext cx="7034784" cy="382136"/>
           </a:xfrm>
           <a:prstGeom prst="rect">
             <a:avLst/>
@@ -168,7 +168,7 @@
               </a:spcAft>
             </a:pPr>
             <a:r>
-              <a:rPr lang="en-US" b="1" sz="1608" dirty="0">
+              <a:rPr lang="en-US" b="1" sz="1000" dirty="0">
                 <a:solidFill>
                   <a:srgbClr val="000000"/>
                 </a:solidFill>
@@ -186,8 +186,8 @@
         </p:nvSpPr>
         <p:spPr>
           <a:xfrm>
-            <a:off x="2517799" y="2705335"/>
-            <a:ext cx="5235034" cy="417689"/>
+            <a:off x="1742568" y="3085094"/>
+            <a:ext cx="3265529" cy="260548"/>
           </a:xfrm>
           <a:prstGeom prst="rect">
             <a:avLst/>
@@ -212,7 +212,7 @@
               </a:spcAft>
             </a:pPr>
             <a:r>
-              <a:rPr lang="en-US" b="1" sz="1608" dirty="0">
+              <a:rPr lang="en-US" b="1" sz="1000" dirty="0">
                 <a:solidFill>
                   <a:srgbClr val="FFFFFF"/>
                 </a:solidFill>
@@ -230,8 +230,8 @@
         </p:nvSpPr>
         <p:spPr>
           <a:xfrm>
-            <a:off x="7864216" y="2705335"/>
-            <a:ext cx="3452895" cy="417689"/>
+            <a:off x="5077577" y="3085094"/>
+            <a:ext cx="2153860" cy="260548"/>
           </a:xfrm>
           <a:prstGeom prst="rect">
             <a:avLst/>
@@ -256,7 +256,7 @@
               </a:spcAft>
             </a:pPr>
             <a:r>
-              <a:rPr lang="en-US" b="1" sz="1608" dirty="0">
+              <a:rPr lang="en-US" b="1" sz="1000" dirty="0">
                 <a:solidFill>
                   <a:srgbClr val="FFFFFF"/>
                 </a:solidFill>
@@ -274,8 +274,8 @@
         </p:nvSpPr>
         <p:spPr>
           <a:xfrm>
-            <a:off x="2517799" y="3234408"/>
-            <a:ext cx="1670756" cy="515150"/>
+            <a:off x="1742568" y="3415121"/>
+            <a:ext cx="1042190" cy="321342"/>
           </a:xfrm>
           <a:prstGeom prst="rect">
             <a:avLst/>
@@ -300,7 +300,7 @@
               </a:spcAft>
             </a:pPr>
             <a:r>
-              <a:rPr lang="en-US" b="1" sz="1608" dirty="0">
+              <a:rPr lang="en-US" b="1" sz="1000" dirty="0">
                 <a:solidFill>
                   <a:srgbClr val="000000"/>
                 </a:solidFill>
@@ -318,8 +318,8 @@
         </p:nvSpPr>
         <p:spPr>
           <a:xfrm>
-            <a:off x="4299938" y="3234408"/>
-            <a:ext cx="1670756" cy="515150"/>
+            <a:off x="2854238" y="3415121"/>
+            <a:ext cx="1042190" cy="321342"/>
           </a:xfrm>
           <a:prstGeom prst="rect">
             <a:avLst/>
@@ -344,7 +344,7 @@
               </a:spcAft>
             </a:pPr>
             <a:r>
-              <a:rPr lang="en-US" b="1" sz="1608" dirty="0">
+              <a:rPr lang="en-US" b="1" sz="1000" dirty="0">
                 <a:solidFill>
                   <a:srgbClr val="000000"/>
                 </a:solidFill>
@@ -362,8 +362,8 @@
         </p:nvSpPr>
         <p:spPr>
           <a:xfrm>
-            <a:off x="6082077" y="3234408"/>
-            <a:ext cx="1670756" cy="515150"/>
+            <a:off x="3965907" y="3415121"/>
+            <a:ext cx="1042190" cy="321342"/>
           </a:xfrm>
           <a:prstGeom prst="rect">
             <a:avLst/>
@@ -388,7 +388,7 @@
               </a:spcAft>
             </a:pPr>
             <a:r>
-              <a:rPr lang="en-US" b="1" sz="1608" dirty="0">
+              <a:rPr lang="en-US" b="1" sz="1000" dirty="0">
                 <a:solidFill>
                   <a:srgbClr val="000000"/>
                 </a:solidFill>
@@ -406,8 +406,8 @@
         </p:nvSpPr>
         <p:spPr>
           <a:xfrm>
-            <a:off x="7864216" y="3234408"/>
-            <a:ext cx="1670756" cy="515150"/>
+            <a:off x="5077577" y="3415121"/>
+            <a:ext cx="1042190" cy="321342"/>
           </a:xfrm>
           <a:prstGeom prst="rect">
             <a:avLst/>
@@ -432,7 +432,7 @@
               </a:spcAft>
             </a:pPr>
             <a:r>
-              <a:rPr lang="en-US" b="1" sz="1608" dirty="0">
+              <a:rPr lang="en-US" b="1" sz="1000" dirty="0">
                 <a:solidFill>
                   <a:srgbClr val="000000"/>
                 </a:solidFill>
@@ -450,8 +450,8 @@
         </p:nvSpPr>
         <p:spPr>
           <a:xfrm>
-            <a:off x="9646356" y="3234408"/>
-            <a:ext cx="1670756" cy="515150"/>
+            <a:off x="6189246" y="3415121"/>
+            <a:ext cx="1042190" cy="321342"/>
           </a:xfrm>
           <a:prstGeom prst="rect">
             <a:avLst/>
@@ -476,7 +476,7 @@
               </a:spcAft>
             </a:pPr>
             <a:r>
-              <a:rPr lang="en-US" b="1" sz="1608" dirty="0">
+              <a:rPr lang="en-US" b="1" sz="1000" dirty="0">
                 <a:solidFill>
                   <a:srgbClr val="000000"/>
                 </a:solidFill>
@@ -494,8 +494,8 @@
         </p:nvSpPr>
         <p:spPr>
           <a:xfrm>
-            <a:off x="2517799" y="3860941"/>
-            <a:ext cx="1670756" cy="417689"/>
+            <a:off x="1742568" y="3805942"/>
+            <a:ext cx="1042190" cy="260548"/>
           </a:xfrm>
           <a:prstGeom prst="rect">
             <a:avLst/>
@@ -520,7 +520,7 @@
               </a:spcAft>
             </a:pPr>
             <a:r>
-              <a:rPr lang="en-US" b="1" sz="1608" dirty="0">
+              <a:rPr lang="en-US" b="1" sz="1000" dirty="0">
                 <a:solidFill>
                   <a:srgbClr val="000000"/>
                 </a:solidFill>
@@ -538,8 +538,8 @@
         </p:nvSpPr>
         <p:spPr>
           <a:xfrm>
-            <a:off x="4299938" y="3860941"/>
-            <a:ext cx="1670756" cy="417689"/>
+            <a:off x="2854238" y="3805942"/>
+            <a:ext cx="1042190" cy="260548"/>
           </a:xfrm>
           <a:prstGeom prst="rect">
             <a:avLst/>
@@ -564,7 +564,7 @@
               </a:spcAft>
             </a:pPr>
             <a:r>
-              <a:rPr lang="en-US" b="1" sz="1608" dirty="0">
+              <a:rPr lang="en-US" b="1" sz="1000" dirty="0">
                 <a:solidFill>
                   <a:srgbClr val="000000"/>
                 </a:solidFill>
@@ -582,8 +582,8 @@
         </p:nvSpPr>
         <p:spPr>
           <a:xfrm>
-            <a:off x="6082077" y="3860941"/>
-            <a:ext cx="1670756" cy="417689"/>
+            <a:off x="3965907" y="3805942"/>
+            <a:ext cx="1042190" cy="260548"/>
           </a:xfrm>
           <a:prstGeom prst="rect">
             <a:avLst/>
@@ -608,7 +608,7 @@
               </a:spcAft>
             </a:pPr>
             <a:r>
-              <a:rPr lang="en-US" b="1" sz="1608" dirty="0">
+              <a:rPr lang="en-US" b="1" sz="1000" dirty="0">
                 <a:solidFill>
                   <a:srgbClr val="000000"/>
                 </a:solidFill>
@@ -626,8 +626,8 @@
         </p:nvSpPr>
         <p:spPr>
           <a:xfrm>
-            <a:off x="7864216" y="3860941"/>
-            <a:ext cx="1670756" cy="417689"/>
+            <a:off x="5077577" y="3805942"/>
+            <a:ext cx="1042190" cy="260548"/>
           </a:xfrm>
           <a:prstGeom prst="rect">
             <a:avLst/>
@@ -652,7 +652,7 @@
               </a:spcAft>
             </a:pPr>
             <a:r>
-              <a:rPr lang="en-US" b="1" sz="1608" dirty="0">
+              <a:rPr lang="en-US" b="1" sz="1000" dirty="0">
                 <a:solidFill>
                   <a:srgbClr val="000000"/>
                 </a:solidFill>
@@ -670,8 +670,8 @@
         </p:nvSpPr>
         <p:spPr>
           <a:xfrm>
-            <a:off x="9646356" y="3860941"/>
-            <a:ext cx="1670756" cy="417689"/>
+            <a:off x="6189246" y="3805942"/>
+            <a:ext cx="1042190" cy="260548"/>
           </a:xfrm>
           <a:prstGeom prst="rect">
             <a:avLst/>
@@ -696,7 +696,7 @@
               </a:spcAft>
             </a:pPr>
             <a:r>
-              <a:rPr lang="en-US" b="1" sz="1608" dirty="0">
+              <a:rPr lang="en-US" b="1" sz="1000" dirty="0">
                 <a:solidFill>
                   <a:srgbClr val="000000"/>
                 </a:solidFill>
@@ -714,8 +714,8 @@
         </p:nvSpPr>
         <p:spPr>
           <a:xfrm>
-            <a:off x="874889" y="4390014"/>
-            <a:ext cx="1531526" cy="361997"/>
+            <a:off x="717748" y="4135969"/>
+            <a:ext cx="955341" cy="225808"/>
           </a:xfrm>
           <a:prstGeom prst="rect">
             <a:avLst/>
@@ -740,7 +740,7 @@
               </a:spcAft>
             </a:pPr>
             <a:r>
-              <a:rPr lang="en-US" b="1" sz="1608" dirty="0">
+              <a:rPr lang="en-US" b="1" sz="1000" dirty="0">
                 <a:solidFill>
                   <a:srgbClr val="FFFFFF"/>
                 </a:solidFill>
@@ -758,8 +758,8 @@
         </p:nvSpPr>
         <p:spPr>
           <a:xfrm>
-            <a:off x="2517799" y="4390014"/>
-            <a:ext cx="1670756" cy="361997"/>
+            <a:off x="1742568" y="4135969"/>
+            <a:ext cx="1042190" cy="225808"/>
           </a:xfrm>
           <a:prstGeom prst="rect">
             <a:avLst/>
@@ -784,7 +784,7 @@
               </a:spcAft>
             </a:pPr>
             <a:r>
-              <a:rPr lang="en-US" sz="1608" dirty="0">
+              <a:rPr lang="en-US" sz="1000" dirty="0">
                 <a:solidFill>
                   <a:srgbClr val="000000"/>
                 </a:solidFill>
@@ -802,8 +802,8 @@
         </p:nvSpPr>
         <p:spPr>
           <a:xfrm>
-            <a:off x="4299938" y="4390014"/>
-            <a:ext cx="1670756" cy="361997"/>
+            <a:off x="2854238" y="4135969"/>
+            <a:ext cx="1042190" cy="225808"/>
           </a:xfrm>
           <a:prstGeom prst="rect">
             <a:avLst/>
@@ -828,7 +828,7 @@
               </a:spcAft>
             </a:pPr>
             <a:r>
-              <a:rPr lang="en-US" sz="1608" dirty="0">
+              <a:rPr lang="en-US" sz="1000" dirty="0">
                 <a:solidFill>
                   <a:srgbClr val="000000"/>
                 </a:solidFill>
@@ -846,8 +846,8 @@
         </p:nvSpPr>
         <p:spPr>
           <a:xfrm>
-            <a:off x="6082077" y="4390014"/>
-            <a:ext cx="1670756" cy="361997"/>
+            <a:off x="3965907" y="4135969"/>
+            <a:ext cx="1042190" cy="225808"/>
           </a:xfrm>
           <a:prstGeom prst="rect">
             <a:avLst/>
@@ -872,7 +872,7 @@
               </a:spcAft>
             </a:pPr>
             <a:r>
-              <a:rPr lang="en-US" sz="1608" dirty="0">
+              <a:rPr lang="en-US" sz="1000" dirty="0">
                 <a:solidFill>
                   <a:srgbClr val="000000"/>
                 </a:solidFill>
@@ -890,8 +890,8 @@
         </p:nvSpPr>
         <p:spPr>
           <a:xfrm>
-            <a:off x="7864216" y="4390014"/>
-            <a:ext cx="1670756" cy="361997"/>
+            <a:off x="5077577" y="4135969"/>
+            <a:ext cx="1042190" cy="225808"/>
           </a:xfrm>
           <a:prstGeom prst="rect">
             <a:avLst/>
@@ -916,7 +916,7 @@
               </a:spcAft>
             </a:pPr>
             <a:r>
-              <a:rPr lang="en-US" sz="1608" dirty="0">
+              <a:rPr lang="en-US" sz="1000" dirty="0">
                 <a:solidFill>
                   <a:srgbClr val="000000"/>
                 </a:solidFill>
@@ -934,8 +934,8 @@
         </p:nvSpPr>
         <p:spPr>
           <a:xfrm>
-            <a:off x="9646356" y="4390014"/>
-            <a:ext cx="1670756" cy="361997"/>
+            <a:off x="6189246" y="4135969"/>
+            <a:ext cx="1042190" cy="225808"/>
           </a:xfrm>
           <a:prstGeom prst="rect">
             <a:avLst/>
@@ -960,7 +960,7 @@
               </a:spcAft>
             </a:pPr>
             <a:r>
-              <a:rPr lang="en-US" sz="1608" dirty="0">
+              <a:rPr lang="en-US" sz="1000" dirty="0">
                 <a:solidFill>
                   <a:srgbClr val="000000"/>
                 </a:solidFill>
@@ -978,8 +978,8 @@
         </p:nvSpPr>
         <p:spPr>
           <a:xfrm>
-            <a:off x="874889" y="4863394"/>
-            <a:ext cx="1531526" cy="361997"/>
+            <a:off x="717748" y="4431256"/>
+            <a:ext cx="955341" cy="225808"/>
           </a:xfrm>
           <a:prstGeom prst="rect">
             <a:avLst/>
@@ -1004,7 +1004,7 @@
               </a:spcAft>
             </a:pPr>
             <a:r>
-              <a:rPr lang="en-US" b="1" sz="1608" dirty="0">
+              <a:rPr lang="en-US" b="1" sz="1000" dirty="0">
                 <a:solidFill>
                   <a:srgbClr val="FFFFFF"/>
                 </a:solidFill>
@@ -1022,8 +1022,8 @@
         </p:nvSpPr>
         <p:spPr>
           <a:xfrm>
-            <a:off x="6082077" y="4863394"/>
-            <a:ext cx="1670756" cy="361997"/>
+            <a:off x="3965907" y="4431256"/>
+            <a:ext cx="1042190" cy="225808"/>
           </a:xfrm>
           <a:prstGeom prst="rect">
             <a:avLst/>
@@ -1048,12 +1048,159 @@
               </a:spcAft>
             </a:pPr>
             <a:r>
-              <a:rPr lang="en-US" sz="1608" dirty="0">
+              <a:rPr lang="en-US" sz="1000" dirty="0">
                 <a:solidFill>
                   <a:srgbClr val="000000"/>
                 </a:solidFill>
               </a:rPr>
               <a:t>Cat</a:t>
+            </a:r>
+          </a:p>
+        </p:txBody>
+      </p:sp>
+      <p:sp>
+        <p:nvSpPr>
+          <p:cNvPr id="4" name="Mermaid source"/>
+          <p:cNvSpPr/>
+          <p:nvPr/>
+        </p:nvSpPr>
+        <p:spPr>
+          <a:xfrm>
+            <a:off x="7674864" y="1028700"/>
+            <a:ext cx="4059936" cy="5372100"/>
+          </a:xfrm>
+          <a:prstGeom prst="rect">
+            <a:avLst/>
+          </a:prstGeom>
+          <a:solidFill>
+            <a:srgbClr val="F3F4F6"/>
+          </a:solidFill>
+          <a:ln w="9525">
+            <a:solidFill>
+              <a:srgbClr val="D1D5DB"/>
+            </a:solidFill>
+          </a:ln>
+        </p:spPr>
+        <p:txBody>
+          <a:bodyPr wrap="square" lIns="91440" tIns="45720" rIns="91440" bIns="45720" anchor="t">
+            <a:noAutofit/>
+          </a:bodyPr>
+          <a:lstStyle/>
+          <a:p>
+            <a:pPr algn="l"/>
+            <a:r>
+              <a:rPr lang="en-US" sz="1400" dirty="0">
+                <a:solidFill>
+                  <a:srgbClr val="1F2937"/>
+                </a:solidFill>
+                <a:latin typeface="Consolas"/>
+                <a:cs typeface="Consolas"/>
+              </a:rPr>
+              <a:t>journey</a:t>
+            </a:r>
+          </a:p>
+          <a:p>
+            <a:pPr algn="l"/>
+            <a:r>
+              <a:rPr lang="en-US" sz="1400" dirty="0">
+                <a:solidFill>
+                  <a:srgbClr val="1F2937"/>
+                </a:solidFill>
+                <a:latin typeface="Consolas"/>
+                <a:cs typeface="Consolas"/>
+              </a:rPr>
+              <a:t>    title My working day</a:t>
+            </a:r>
+          </a:p>
+          <a:p>
+            <a:pPr algn="l"/>
+            <a:r>
+              <a:rPr lang="en-US" sz="1400" dirty="0">
+                <a:solidFill>
+                  <a:srgbClr val="1F2937"/>
+                </a:solidFill>
+                <a:latin typeface="Consolas"/>
+                <a:cs typeface="Consolas"/>
+              </a:rPr>
+              <a:t>    section Go to work</a:t>
+            </a:r>
+          </a:p>
+          <a:p>
+            <a:pPr algn="l"/>
+            <a:r>
+              <a:rPr lang="en-US" sz="1400" dirty="0">
+                <a:solidFill>
+                  <a:srgbClr val="1F2937"/>
+                </a:solidFill>
+                <a:latin typeface="Consolas"/>
+                <a:cs typeface="Consolas"/>
+              </a:rPr>
+              <a:t>      Make tea: 5: Me</a:t>
+            </a:r>
+          </a:p>
+          <a:p>
+            <a:pPr algn="l"/>
+            <a:r>
+              <a:rPr lang="en-US" sz="1400" dirty="0">
+                <a:solidFill>
+                  <a:srgbClr val="1F2937"/>
+                </a:solidFill>
+                <a:latin typeface="Consolas"/>
+                <a:cs typeface="Consolas"/>
+              </a:rPr>
+              <a:t>      Go upstairs: 3: Me</a:t>
+            </a:r>
+          </a:p>
+          <a:p>
+            <a:pPr algn="l"/>
+            <a:r>
+              <a:rPr lang="en-US" sz="1400" dirty="0">
+                <a:solidFill>
+                  <a:srgbClr val="1F2937"/>
+                </a:solidFill>
+                <a:latin typeface="Consolas"/>
+                <a:cs typeface="Consolas"/>
+              </a:rPr>
+              <a:t>      Do work: 1: Me, Cat</a:t>
+            </a:r>
+          </a:p>
+          <a:p>
+            <a:pPr algn="l"/>
+            <a:r>
+              <a:rPr lang="en-US" sz="1400" dirty="0">
+                <a:solidFill>
+                  <a:srgbClr val="1F2937"/>
+                </a:solidFill>
+                <a:latin typeface="Consolas"/>
+                <a:cs typeface="Consolas"/>
+              </a:rPr>
+              <a:t>    section Go home</a:t>
+            </a:r>
+          </a:p>
+          <a:p>
+            <a:pPr algn="l"/>
+            <a:r>
+              <a:rPr lang="en-US" sz="1400" dirty="0">
+                <a:solidFill>
+                  <a:srgbClr val="1F2937"/>
+                </a:solidFill>
+                <a:latin typeface="Consolas"/>
+                <a:cs typeface="Consolas"/>
+              </a:rPr>
+              <a:t>      Go downstairs: 5: Me</a:t>
+            </a:r>
+          </a:p>
+          <a:p>
+            <a:pPr algn="l"/>
+            <a:r>
+              <a:rPr lang="en-US" sz="1400" dirty="0">
+                <a:solidFill>
+                  <a:srgbClr val="1F2937"/>
+                </a:solidFill>
+                <a:latin typeface="Consolas"/>
+                <a:cs typeface="Consolas"/>
+              </a:rPr>
+              <a:t>      Sit down: 5: Me</a:t>
             </a:r>
           </a:p>
         </p:txBody>
